--- a/docs/poster/variants/v10.pptx
+++ b/docs/poster/variants/v10.pptx
@@ -4415,6 +4415,90 @@
               </a:spcAft>
             </a:pPr>
             <a:r>
+              <a:rPr sz="6200" b="1">
+                <a:solidFill>
+                  <a:srgbClr val="1C6FB5"/>
+                </a:solidFill>
+                <a:latin typeface="Times New Roman"/>
+              </a:rPr>
+              <a:t>14</a:t>
+            </a:r>
+          </a:p>
+        </p:txBody>
+      </p:sp>
+      <p:sp>
+        <p:nvSpPr>
+          <p:cNvPr id="34" name="TextBox 33"/>
+          <p:cNvSpPr txBox="1"/>
+          <p:nvPr/>
+        </p:nvSpPr>
+        <p:spPr>
+          <a:xfrm>
+            <a:off x="731520" y="19105880"/>
+            <a:ext cx="20482560" cy="365760"/>
+          </a:xfrm>
+          <a:prstGeom prst="rect">
+            <a:avLst/>
+          </a:prstGeom>
+          <a:noFill/>
+        </p:spPr>
+        <p:txBody>
+          <a:bodyPr wrap="square" lIns="0" rIns="0" tIns="0" bIns="0">
+            <a:spAutoFit/>
+          </a:bodyPr>
+          <a:lstStyle/>
+          <a:p>
+            <a:pPr algn="l">
+              <a:lnSpc>
+                <a:spcPct val="122000"/>
+              </a:lnSpc>
+              <a:spcAft>
+                <a:spcPts val="600"/>
+              </a:spcAft>
+            </a:pPr>
+            <a:r>
+              <a:rPr sz="1700" b="0">
+                <a:solidFill>
+                  <a:srgbClr val="556575"/>
+                </a:solidFill>
+                <a:latin typeface="Arial"/>
+              </a:rPr>
+              <a:t>analysis tools the planner can choose from</a:t>
+            </a:r>
+          </a:p>
+        </p:txBody>
+      </p:sp>
+      <p:sp>
+        <p:nvSpPr>
+          <p:cNvPr id="35" name="TextBox 34"/>
+          <p:cNvSpPr txBox="1"/>
+          <p:nvPr/>
+        </p:nvSpPr>
+        <p:spPr>
+          <a:xfrm>
+            <a:off x="731520" y="19591782"/>
+            <a:ext cx="20482560" cy="365760"/>
+          </a:xfrm>
+          <a:prstGeom prst="rect">
+            <a:avLst/>
+          </a:prstGeom>
+          <a:noFill/>
+        </p:spPr>
+        <p:txBody>
+          <a:bodyPr wrap="square" lIns="0" rIns="0" tIns="0" bIns="0">
+            <a:spAutoFit/>
+          </a:bodyPr>
+          <a:lstStyle/>
+          <a:p>
+            <a:pPr algn="l">
+              <a:lnSpc>
+                <a:spcPct val="95000"/>
+              </a:lnSpc>
+              <a:spcAft>
+                <a:spcPts val="0"/>
+              </a:spcAft>
+            </a:pPr>
+            <a:r>
               <a:rPr sz="3600" b="1">
                 <a:solidFill>
                   <a:srgbClr val="14314E"/>
@@ -4428,13 +4512,13 @@
       </p:sp>
       <p:sp>
         <p:nvSpPr>
-          <p:cNvPr id="34" name="Rectangle 33"/>
+          <p:cNvPr id="36" name="Rectangle 35"/>
           <p:cNvSpPr/>
           <p:nvPr/>
         </p:nvSpPr>
         <p:spPr>
           <a:xfrm>
-            <a:off x="731520" y="18897092"/>
+            <a:off x="731520" y="20186142"/>
             <a:ext cx="20482560" cy="27432"/>
           </a:xfrm>
           <a:prstGeom prst="rect">
@@ -4472,13 +4556,13 @@
       </p:sp>
       <p:sp>
         <p:nvSpPr>
-          <p:cNvPr id="35" name="TextBox 34"/>
+          <p:cNvPr id="37" name="TextBox 36"/>
           <p:cNvSpPr txBox="1"/>
           <p:nvPr/>
         </p:nvSpPr>
         <p:spPr>
           <a:xfrm>
-            <a:off x="731520" y="19226276"/>
+            <a:off x="731520" y="20515326"/>
             <a:ext cx="20482560" cy="365760"/>
           </a:xfrm>
           <a:prstGeom prst="rect">
@@ -4514,13 +4598,13 @@
       </p:sp>
       <p:sp>
         <p:nvSpPr>
-          <p:cNvPr id="36" name="TextBox 35"/>
+          <p:cNvPr id="38" name="TextBox 37"/>
           <p:cNvSpPr txBox="1"/>
           <p:nvPr/>
         </p:nvSpPr>
         <p:spPr>
           <a:xfrm>
-            <a:off x="731520" y="20993608"/>
+            <a:off x="22677120" y="12920980"/>
             <a:ext cx="20482560" cy="365760"/>
           </a:xfrm>
           <a:prstGeom prst="rect">
@@ -4549,20 +4633,20 @@
                 </a:solidFill>
                 <a:latin typeface="Times New Roman"/>
               </a:rPr>
-              <a:t>Everything we trained, ran, or rejected</a:t>
-            </a:r>
-          </a:p>
-        </p:txBody>
-      </p:sp>
-      <p:sp>
-        <p:nvSpPr>
-          <p:cNvPr id="37" name="Rectangle 36"/>
+              <a:t>Robots on the platform today</a:t>
+            </a:r>
+          </a:p>
+        </p:txBody>
+      </p:sp>
+      <p:sp>
+        <p:nvSpPr>
+          <p:cNvPr id="39" name="Rectangle 38"/>
           <p:cNvSpPr/>
           <p:nvPr/>
         </p:nvSpPr>
         <p:spPr>
           <a:xfrm>
-            <a:off x="731520" y="21587968"/>
+            <a:off x="22677120" y="13515340"/>
             <a:ext cx="20482560" cy="27432"/>
           </a:xfrm>
           <a:prstGeom prst="rect">
@@ -4598,72 +4682,6 @@
           </a:p>
         </p:txBody>
       </p:sp>
-      <p:pic>
-        <p:nvPicPr>
-          <p:cNvPr id="38" name="Picture 37" descr="m_ledger.png"/>
-          <p:cNvPicPr>
-            <a:picLocks noChangeAspect="1"/>
-          </p:cNvPicPr>
-          <p:nvPr/>
-        </p:nvPicPr>
-        <p:blipFill>
-          <a:blip r:embed="rId3"/>
-          <a:stretch>
-            <a:fillRect/>
-          </a:stretch>
-        </p:blipFill>
-        <p:spPr>
-          <a:xfrm>
-            <a:off x="731520" y="21917152"/>
-            <a:ext cx="20482560" cy="3749040"/>
-          </a:xfrm>
-          <a:prstGeom prst="rect">
-            <a:avLst/>
-          </a:prstGeom>
-        </p:spPr>
-      </p:pic>
-      <p:sp>
-        <p:nvSpPr>
-          <p:cNvPr id="39" name="TextBox 38"/>
-          <p:cNvSpPr txBox="1"/>
-          <p:nvPr/>
-        </p:nvSpPr>
-        <p:spPr>
-          <a:xfrm>
-            <a:off x="731520" y="25775919"/>
-            <a:ext cx="20482560" cy="365760"/>
-          </a:xfrm>
-          <a:prstGeom prst="rect">
-            <a:avLst/>
-          </a:prstGeom>
-          <a:noFill/>
-        </p:spPr>
-        <p:txBody>
-          <a:bodyPr wrap="square" lIns="0" rIns="0" tIns="0" bIns="0">
-            <a:spAutoFit/>
-          </a:bodyPr>
-          <a:lstStyle/>
-          <a:p>
-            <a:pPr algn="l">
-              <a:lnSpc>
-                <a:spcPct val="118000"/>
-              </a:lnSpc>
-              <a:spcAft>
-                <a:spcPts val="0"/>
-              </a:spcAft>
-            </a:pPr>
-            <a:r>
-              <a:rPr sz="1700" b="0">
-                <a:solidFill>
-                  <a:srgbClr val="556575"/>
-                </a:solidFill>
-                <a:latin typeface="Arial"/>
-              </a:rPr>
-              <a:t>Figure 3.  30 rows in four families, which is 27 distinct models: OWLv2-large and Qwen2.5-7B each appear twice because each does two jobs here. One model is deployed. The zero-shot column is a single deterministic pass per model with no repeats, scored as mAP50 on the 848-image split; the reviewer column is the 149-case dev split, and two of its arms are still running. RF-DETR's score is on a third scale and is never differenced against the rows above it: the one measured offset between two of our evaluators, 0.0239, is larger than the gap on display.</a:t>
-            </a:r>
-          </a:p>
-        </p:txBody>
-      </p:sp>
       <p:sp>
         <p:nvSpPr>
           <p:cNvPr id="40" name="TextBox 39"/>
@@ -4672,7 +4690,7 @@
         </p:nvSpPr>
         <p:spPr>
           <a:xfrm>
-            <a:off x="731520" y="26851101"/>
+            <a:off x="22677120" y="13844523"/>
             <a:ext cx="20482560" cy="365760"/>
           </a:xfrm>
           <a:prstGeom prst="rect">
@@ -4701,7 +4719,7 @@
                 </a:solidFill>
                 <a:latin typeface="Arial"/>
               </a:rPr>
-              <a:t>Thirty rows in four families, which is 27 distinct models. Five detectors trained on our own holdout, two vision models inside the loop, fourteen vision-language models zero-shot, and nine language models as reviewers. One is deployed.</a:t>
+              <a:t>Robot 241 is a tracked rover that drives crop rows and streams camera, GPS and two IMUs. The laser cart carries the weeder: a galvanometer laser, a down camera over the work zone and a forward camera. Ten projects sit on the platform and two of them have a robot reporting into them. Between those two vehicles, 2,686 frames in 26 drives.</a:t>
             </a:r>
           </a:p>
         </p:txBody>
@@ -4714,7 +4732,7 @@
         </p:nvSpPr>
         <p:spPr>
           <a:xfrm>
-            <a:off x="22677120" y="12920980"/>
+            <a:off x="22677120" y="15611856"/>
             <a:ext cx="20482560" cy="365760"/>
           </a:xfrm>
           <a:prstGeom prst="rect">
@@ -4737,26 +4755,110 @@
               </a:spcAft>
             </a:pPr>
             <a:r>
-              <a:rPr sz="3600" b="1">
-                <a:solidFill>
-                  <a:srgbClr val="14314E"/>
+              <a:rPr sz="6200" b="1">
+                <a:solidFill>
+                  <a:srgbClr val="1C6FB5"/>
                 </a:solidFill>
                 <a:latin typeface="Times New Roman"/>
               </a:rPr>
-              <a:t>Robots on the platform today</a:t>
-            </a:r>
-          </a:p>
-        </p:txBody>
-      </p:sp>
-      <p:sp>
-        <p:nvSpPr>
-          <p:cNvPr id="42" name="Rectangle 41"/>
+              <a:t>1,389</a:t>
+            </a:r>
+          </a:p>
+        </p:txBody>
+      </p:sp>
+      <p:sp>
+        <p:nvSpPr>
+          <p:cNvPr id="42" name="TextBox 41"/>
+          <p:cNvSpPr txBox="1"/>
+          <p:nvPr/>
+        </p:nvSpPr>
+        <p:spPr>
+          <a:xfrm>
+            <a:off x="22677120" y="16415004"/>
+            <a:ext cx="20482560" cy="365760"/>
+          </a:xfrm>
+          <a:prstGeom prst="rect">
+            <a:avLst/>
+          </a:prstGeom>
+          <a:noFill/>
+        </p:spPr>
+        <p:txBody>
+          <a:bodyPr wrap="square" lIns="0" rIns="0" tIns="0" bIns="0">
+            <a:spAutoFit/>
+          </a:bodyPr>
+          <a:lstStyle/>
+          <a:p>
+            <a:pPr algn="l">
+              <a:lnSpc>
+                <a:spcPct val="122000"/>
+              </a:lnSpc>
+              <a:spcAft>
+                <a:spcPts val="600"/>
+              </a:spcAft>
+            </a:pPr>
+            <a:r>
+              <a:rPr sz="1700" b="0">
+                <a:solidFill>
+                  <a:srgbClr val="556575"/>
+                </a:solidFill>
+                <a:latin typeface="Arial"/>
+              </a:rPr>
+              <a:t>joystick commands through the platform</a:t>
+            </a:r>
+          </a:p>
+        </p:txBody>
+      </p:sp>
+      <p:sp>
+        <p:nvSpPr>
+          <p:cNvPr id="43" name="TextBox 42"/>
+          <p:cNvSpPr txBox="1"/>
+          <p:nvPr/>
+        </p:nvSpPr>
+        <p:spPr>
+          <a:xfrm>
+            <a:off x="22677120" y="16900906"/>
+            <a:ext cx="20482560" cy="365760"/>
+          </a:xfrm>
+          <a:prstGeom prst="rect">
+            <a:avLst/>
+          </a:prstGeom>
+          <a:noFill/>
+        </p:spPr>
+        <p:txBody>
+          <a:bodyPr wrap="square" lIns="0" rIns="0" tIns="0" bIns="0">
+            <a:spAutoFit/>
+          </a:bodyPr>
+          <a:lstStyle/>
+          <a:p>
+            <a:pPr algn="l">
+              <a:lnSpc>
+                <a:spcPct val="95000"/>
+              </a:lnSpc>
+              <a:spcAft>
+                <a:spcPts val="0"/>
+              </a:spcAft>
+            </a:pPr>
+            <a:r>
+              <a:rPr sz="3600" b="1">
+                <a:solidFill>
+                  <a:srgbClr val="14314E"/>
+                </a:solidFill>
+                <a:latin typeface="Times New Roman"/>
+              </a:rPr>
+              <a:t>Driving a robot from a browser</a:t>
+            </a:r>
+          </a:p>
+        </p:txBody>
+      </p:sp>
+      <p:sp>
+        <p:nvSpPr>
+          <p:cNvPr id="44" name="Rectangle 43"/>
           <p:cNvSpPr/>
           <p:nvPr/>
         </p:nvSpPr>
         <p:spPr>
           <a:xfrm>
-            <a:off x="22677120" y="13515340"/>
+            <a:off x="22677120" y="17495266"/>
             <a:ext cx="20482560" cy="27432"/>
           </a:xfrm>
           <a:prstGeom prst="rect">
@@ -4794,13 +4896,13 @@
       </p:sp>
       <p:sp>
         <p:nvSpPr>
-          <p:cNvPr id="43" name="TextBox 42"/>
+          <p:cNvPr id="45" name="TextBox 44"/>
           <p:cNvSpPr txBox="1"/>
           <p:nvPr/>
         </p:nvSpPr>
         <p:spPr>
           <a:xfrm>
-            <a:off x="22677120" y="13844523"/>
+            <a:off x="22677120" y="17824450"/>
             <a:ext cx="20482560" cy="365760"/>
           </a:xfrm>
           <a:prstGeom prst="rect">
@@ -4829,20 +4931,20 @@
                 </a:solidFill>
                 <a:latin typeface="Arial"/>
               </a:rPr>
-              <a:t>Robot 241 is a tracked rover that drives crop rows and streams camera, GPS and two IMUs. The laser cart carries the weeder: a galvanometer laser, a down camera over the work zone and a forward camera. A Unitree humanoid has a project and has uploaded nothing yet. Between them the two ground vehicles have recorded 2,686 frames in 26 drives.</a:t>
-            </a:r>
-          </a:p>
-        </p:txBody>
-      </p:sp>
-      <p:sp>
-        <p:nvSpPr>
-          <p:cNvPr id="44" name="TextBox 43"/>
+              <a:t>A signed-in user opens the 241 project and clicks Drive. The platform reverse-proxies the robot's own console over the lab tailnet, so the rover is driven from a plain browser with no VPN client. 1,389 joystick commands have gone through that path. Two gates sit in front of it: the platform's Google login, then the robot's own password.</a:t>
+            </a:r>
+          </a:p>
+        </p:txBody>
+      </p:sp>
+      <p:sp>
+        <p:nvSpPr>
+          <p:cNvPr id="46" name="TextBox 45"/>
           <p:cNvSpPr txBox="1"/>
           <p:nvPr/>
         </p:nvSpPr>
         <p:spPr>
           <a:xfrm>
-            <a:off x="22677120" y="15611856"/>
+            <a:off x="22677120" y="19591782"/>
             <a:ext cx="20482560" cy="365760"/>
           </a:xfrm>
           <a:prstGeom prst="rect">
@@ -4871,20 +4973,20 @@
                 </a:solidFill>
                 <a:latin typeface="Times New Roman"/>
               </a:rPr>
-              <a:t>Driving a robot from a browser</a:t>
-            </a:r>
-          </a:p>
-        </p:txBody>
-      </p:sp>
-      <p:sp>
-        <p:nvSpPr>
-          <p:cNvPr id="45" name="Rectangle 44"/>
+              <a:t>Left alone for fifteen rounds</a:t>
+            </a:r>
+          </a:p>
+        </p:txBody>
+      </p:sp>
+      <p:sp>
+        <p:nvSpPr>
+          <p:cNvPr id="47" name="Rectangle 46"/>
           <p:cNvSpPr/>
           <p:nvPr/>
         </p:nvSpPr>
         <p:spPr>
           <a:xfrm>
-            <a:off x="22677120" y="16206216"/>
+            <a:off x="22677120" y="20186142"/>
             <a:ext cx="20482560" cy="27432"/>
           </a:xfrm>
           <a:prstGeom prst="rect">
@@ -4920,15 +5022,81 @@
           </a:p>
         </p:txBody>
       </p:sp>
-      <p:sp>
-        <p:nvSpPr>
-          <p:cNvPr id="46" name="TextBox 45"/>
+      <p:pic>
+        <p:nvPicPr>
+          <p:cNvPr id="48" name="Picture 47" descr="f_rounds.png"/>
+          <p:cNvPicPr>
+            <a:picLocks noChangeAspect="1"/>
+          </p:cNvPicPr>
+          <p:nvPr/>
+        </p:nvPicPr>
+        <p:blipFill>
+          <a:blip r:embed="rId3"/>
+          <a:stretch>
+            <a:fillRect/>
+          </a:stretch>
+        </p:blipFill>
+        <p:spPr>
+          <a:xfrm>
+            <a:off x="22677120" y="20515326"/>
+            <a:ext cx="20482560" cy="4663440"/>
+          </a:xfrm>
+          <a:prstGeom prst="rect">
+            <a:avLst/>
+          </a:prstGeom>
+        </p:spPr>
+      </p:pic>
+      <p:sp>
+        <p:nvSpPr>
+          <p:cNvPr id="49" name="TextBox 48"/>
           <p:cNvSpPr txBox="1"/>
           <p:nvPr/>
         </p:nvSpPr>
         <p:spPr>
           <a:xfrm>
-            <a:off x="22677120" y="16535399"/>
+            <a:off x="22677120" y="25288493"/>
+            <a:ext cx="20482560" cy="365760"/>
+          </a:xfrm>
+          <a:prstGeom prst="rect">
+            <a:avLst/>
+          </a:prstGeom>
+          <a:noFill/>
+        </p:spPr>
+        <p:txBody>
+          <a:bodyPr wrap="square" lIns="0" rIns="0" tIns="0" bIns="0">
+            <a:spAutoFit/>
+          </a:bodyPr>
+          <a:lstStyle/>
+          <a:p>
+            <a:pPr algn="l">
+              <a:lnSpc>
+                <a:spcPct val="118000"/>
+              </a:lnSpc>
+              <a:spcAft>
+                <a:spcPts val="0"/>
+              </a:spcAft>
+            </a:pPr>
+            <a:r>
+              <a:rPr sz="1700" b="0">
+                <a:solidFill>
+                  <a:srgbClr val="556575"/>
+                </a:solidFill>
+                <a:latin typeface="Arial"/>
+              </a:rPr>
+              <a:t>Figure 3.  (f) Fifteen unattended rounds on a fixed holdout. (g) Round 15's exact dataset, three ways. The first two marks differ only in the starting weights, so their gap is the warm-start chain; the third is the recipe the campaign ran, whose wall-clock cap truncates the cosine, with its three seeds drawn behind it. Sigma throughout is that recipe's own seed spread, 0.0040 over three seeds, propagated to the difference being quoted. Completing the schedule is not the fix -- the second mark sits below the third.</a:t>
+            </a:r>
+          </a:p>
+        </p:txBody>
+      </p:sp>
+      <p:sp>
+        <p:nvSpPr>
+          <p:cNvPr id="50" name="TextBox 49"/>
+          <p:cNvSpPr txBox="1"/>
+          <p:nvPr/>
+        </p:nvSpPr>
+        <p:spPr>
+          <a:xfrm>
+            <a:off x="22677120" y="26363675"/>
             <a:ext cx="20482560" cy="365760"/>
           </a:xfrm>
           <a:prstGeom prst="rect">
@@ -4957,69 +5125,27 @@
                 </a:solidFill>
                 <a:latin typeface="Arial"/>
               </a:rPr>
-              <a:t>A signed-in user opens the 241 project and clicks Drive. The platform reverse-proxies the robot's own console over the lab tailnet, so the rover is driven from a plain browser with no VPN client. 1,389 joystick commands have gone through that path. Two gates sit in front of it: the platform's Google login, then the robot's own password.</a:t>
-            </a:r>
-          </a:p>
-        </p:txBody>
-      </p:sp>
-      <p:sp>
-        <p:nvSpPr>
-          <p:cNvPr id="47" name="TextBox 46"/>
-          <p:cNvSpPr txBox="1"/>
-          <p:nvPr/>
-        </p:nvSpPr>
-        <p:spPr>
-          <a:xfrm>
-            <a:off x="22677120" y="18302732"/>
-            <a:ext cx="20482560" cy="365760"/>
-          </a:xfrm>
-          <a:prstGeom prst="rect">
-            <a:avLst/>
-          </a:prstGeom>
-          <a:noFill/>
-        </p:spPr>
-        <p:txBody>
-          <a:bodyPr wrap="square" lIns="0" rIns="0" tIns="0" bIns="0">
-            <a:spAutoFit/>
-          </a:bodyPr>
-          <a:lstStyle/>
-          <a:p>
-            <a:pPr algn="l">
-              <a:lnSpc>
-                <a:spcPct val="95000"/>
-              </a:lnSpc>
-              <a:spcAft>
-                <a:spcPts val="0"/>
-              </a:spcAft>
-            </a:pPr>
-            <a:r>
-              <a:rPr sz="3600" b="1">
-                <a:solidFill>
-                  <a:srgbClr val="14314E"/>
-                </a:solidFill>
-                <a:latin typeface="Times New Roman"/>
-              </a:rPr>
-              <a:t>Left alone for fifteen rounds</a:t>
-            </a:r>
-          </a:p>
-        </p:txBody>
-      </p:sp>
-      <p:sp>
-        <p:nvSpPr>
-          <p:cNvPr id="48" name="Rectangle 47"/>
+              <a:t>Two cluster jobs, one collecting and one training, ran fifteen rounds against the locked registry with nobody in the room. Each round searched public sources, filtered what it found, merged, trained and evaluated. Every round reported success. Accuracy fell for fifteen rounds. This part is built and is switched off today.</a:t>
+            </a:r>
+          </a:p>
+        </p:txBody>
+      </p:sp>
+      <p:sp>
+        <p:nvSpPr>
+          <p:cNvPr id="51" name="Rectangle 50"/>
           <p:cNvSpPr/>
           <p:nvPr/>
         </p:nvSpPr>
         <p:spPr>
           <a:xfrm>
-            <a:off x="22677120" y="18897092"/>
-            <a:ext cx="20482560" cy="27432"/>
+            <a:off x="731520" y="30632400"/>
+            <a:ext cx="42428160" cy="20116"/>
           </a:xfrm>
           <a:prstGeom prst="rect">
             <a:avLst/>
           </a:prstGeom>
           <a:solidFill>
-            <a:srgbClr val="1C6FB5"/>
+            <a:srgbClr val="C2CEDA"/>
           </a:solidFill>
           <a:ln>
             <a:noFill/>
@@ -5048,161 +5174,9 @@
           </a:p>
         </p:txBody>
       </p:sp>
-      <p:pic>
-        <p:nvPicPr>
-          <p:cNvPr id="49" name="Picture 48" descr="f_rounds.png"/>
-          <p:cNvPicPr>
-            <a:picLocks noChangeAspect="1"/>
-          </p:cNvPicPr>
-          <p:nvPr/>
-        </p:nvPicPr>
-        <p:blipFill>
-          <a:blip r:embed="rId4"/>
-          <a:stretch>
-            <a:fillRect/>
-          </a:stretch>
-        </p:blipFill>
-        <p:spPr>
-          <a:xfrm>
-            <a:off x="22677120" y="19226276"/>
-            <a:ext cx="20482560" cy="4663440"/>
-          </a:xfrm>
-          <a:prstGeom prst="rect">
-            <a:avLst/>
-          </a:prstGeom>
-        </p:spPr>
-      </p:pic>
-      <p:sp>
-        <p:nvSpPr>
-          <p:cNvPr id="50" name="TextBox 49"/>
-          <p:cNvSpPr txBox="1"/>
-          <p:nvPr/>
-        </p:nvSpPr>
-        <p:spPr>
-          <a:xfrm>
-            <a:off x="22677120" y="23999443"/>
-            <a:ext cx="20482560" cy="365760"/>
-          </a:xfrm>
-          <a:prstGeom prst="rect">
-            <a:avLst/>
-          </a:prstGeom>
-          <a:noFill/>
-        </p:spPr>
-        <p:txBody>
-          <a:bodyPr wrap="square" lIns="0" rIns="0" tIns="0" bIns="0">
-            <a:spAutoFit/>
-          </a:bodyPr>
-          <a:lstStyle/>
-          <a:p>
-            <a:pPr algn="l">
-              <a:lnSpc>
-                <a:spcPct val="118000"/>
-              </a:lnSpc>
-              <a:spcAft>
-                <a:spcPts val="0"/>
-              </a:spcAft>
-            </a:pPr>
-            <a:r>
-              <a:rPr sz="1700" b="0">
-                <a:solidFill>
-                  <a:srgbClr val="556575"/>
-                </a:solidFill>
-                <a:latin typeface="Arial"/>
-              </a:rPr>
-              <a:t>Figure 4.  (f) Fifteen unattended rounds on a fixed holdout. (g) Round 15's exact dataset, three ways. The first two marks differ only in the starting weights, so their gap is the warm-start chain; the third is the recipe the campaign ran, whose wall-clock cap truncates the cosine, with its three seeds drawn behind it. Sigma throughout is that recipe's own seed spread, 0.0040 over three seeds, propagated to the difference being quoted. Completing the schedule is not the fix -- the second mark sits below the third.</a:t>
-            </a:r>
-          </a:p>
-        </p:txBody>
-      </p:sp>
-      <p:sp>
-        <p:nvSpPr>
-          <p:cNvPr id="51" name="TextBox 50"/>
-          <p:cNvSpPr txBox="1"/>
-          <p:nvPr/>
-        </p:nvSpPr>
-        <p:spPr>
-          <a:xfrm>
-            <a:off x="22677120" y="25074625"/>
-            <a:ext cx="20482560" cy="365760"/>
-          </a:xfrm>
-          <a:prstGeom prst="rect">
-            <a:avLst/>
-          </a:prstGeom>
-          <a:noFill/>
-        </p:spPr>
-        <p:txBody>
-          <a:bodyPr wrap="square" lIns="0" rIns="0" tIns="0" bIns="0">
-            <a:spAutoFit/>
-          </a:bodyPr>
-          <a:lstStyle/>
-          <a:p>
-            <a:pPr algn="l">
-              <a:lnSpc>
-                <a:spcPct val="122000"/>
-              </a:lnSpc>
-              <a:spcAft>
-                <a:spcPts val="1400"/>
-              </a:spcAft>
-            </a:pPr>
-            <a:r>
-              <a:rPr sz="2200" b="0">
-                <a:solidFill>
-                  <a:srgbClr val="1E293B"/>
-                </a:solidFill>
-                <a:latin typeface="Arial"/>
-              </a:rPr>
-              <a:t>Two cluster jobs, one collecting and one training, ran fifteen rounds against the locked registry with nobody in the room. Each round searched public sources, filtered what it found, merged, trained and evaluated. Every round reported success. Accuracy fell for fifteen rounds. This part is built and is switched off today.</a:t>
-            </a:r>
-          </a:p>
-        </p:txBody>
-      </p:sp>
-      <p:sp>
-        <p:nvSpPr>
-          <p:cNvPr id="52" name="Rectangle 51"/>
-          <p:cNvSpPr/>
-          <p:nvPr/>
-        </p:nvSpPr>
-        <p:spPr>
-          <a:xfrm>
-            <a:off x="731520" y="30632400"/>
-            <a:ext cx="42428160" cy="20116"/>
-          </a:xfrm>
-          <a:prstGeom prst="rect">
-            <a:avLst/>
-          </a:prstGeom>
-          <a:solidFill>
-            <a:srgbClr val="C2CEDA"/>
-          </a:solidFill>
-          <a:ln>
-            <a:noFill/>
-          </a:ln>
-          <a:effectLst/>
-        </p:spPr>
-        <p:style>
-          <a:lnRef idx="1">
-            <a:schemeClr val="accent1"/>
-          </a:lnRef>
-          <a:fillRef idx="3">
-            <a:schemeClr val="accent1"/>
-          </a:fillRef>
-          <a:effectRef idx="2">
-            <a:schemeClr val="accent1"/>
-          </a:effectRef>
-          <a:fontRef idx="minor">
-            <a:schemeClr val="lt1"/>
-          </a:fontRef>
-        </p:style>
-        <p:txBody>
-          <a:bodyPr rtlCol="0" anchor="ctr"/>
-          <a:lstStyle/>
-          <a:p>
-            <a:pPr algn="ctr"/>
-          </a:p>
-        </p:txBody>
-      </p:sp>
-      <p:sp>
-        <p:nvSpPr>
-          <p:cNvPr id="53" name="TextBox 52"/>
+      <p:sp>
+        <p:nvSpPr>
+          <p:cNvPr id="52" name="TextBox 51"/>
           <p:cNvSpPr txBox="1"/>
           <p:nvPr/>
         </p:nvSpPr>
@@ -5244,7 +5218,7 @@
       </p:sp>
       <p:sp>
         <p:nvSpPr>
-          <p:cNvPr id="54" name="TextBox 53"/>
+          <p:cNvPr id="53" name="TextBox 52"/>
           <p:cNvSpPr txBox="1"/>
           <p:nvPr/>
         </p:nvSpPr>
@@ -5286,7 +5260,7 @@
       </p:sp>
       <p:sp>
         <p:nvSpPr>
-          <p:cNvPr id="55" name="TextBox 54"/>
+          <p:cNvPr id="54" name="TextBox 53"/>
           <p:cNvSpPr txBox="1"/>
           <p:nvPr/>
         </p:nvSpPr>
